--- a/Botbrain_assignment_ppt.pptx
+++ b/Botbrain_assignment_ppt.pptx
@@ -220,7 +220,7 @@
           <a:p>
             <a:fld id="{1FE16418-8FB6-4C09-9739-2C5F67EF1EA9}" type="datetimeFigureOut">
               <a:rPr lang="en-US" smtClean="0"/>
-              <a:t>9/23/2025</a:t>
+              <a:t>9/24/2025</a:t>
             </a:fld>
             <a:endParaRPr lang="en-US"/>
           </a:p>
@@ -1424,7 +1424,7 @@
           <a:p>
             <a:fld id="{53BEF823-48A5-43FC-BE03-E79964288B41}" type="datetimeFigureOut">
               <a:rPr lang="en-US" smtClean="0"/>
-              <a:t>9/23/2025</a:t>
+              <a:t>9/24/2025</a:t>
             </a:fld>
             <a:endParaRPr lang="en-US" dirty="0"/>
           </a:p>
@@ -1635,7 +1635,7 @@
             <a:fld id="{53BEF823-48A5-43FC-BE03-E79964288B41}" type="datetimeFigureOut">
               <a:rPr lang="en-US" smtClean="0"/>
               <a:pPr algn="r"/>
-              <a:t>9/23/2025</a:t>
+              <a:t>9/24/2025</a:t>
             </a:fld>
             <a:endParaRPr lang="en-US" dirty="0"/>
           </a:p>
@@ -1850,7 +1850,7 @@
             <a:fld id="{53BEF823-48A5-43FC-BE03-E79964288B41}" type="datetimeFigureOut">
               <a:rPr lang="en-US" smtClean="0"/>
               <a:pPr algn="r"/>
-              <a:t>9/23/2025</a:t>
+              <a:t>9/24/2025</a:t>
             </a:fld>
             <a:endParaRPr lang="en-US" dirty="0"/>
           </a:p>
@@ -2053,7 +2053,7 @@
             <a:fld id="{53BEF823-48A5-43FC-BE03-E79964288B41}" type="datetimeFigureOut">
               <a:rPr lang="en-US" smtClean="0"/>
               <a:pPr algn="r"/>
-              <a:t>9/23/2025</a:t>
+              <a:t>9/24/2025</a:t>
             </a:fld>
             <a:endParaRPr lang="en-US" dirty="0"/>
           </a:p>
@@ -2337,7 +2337,7 @@
             <a:fld id="{53BEF823-48A5-43FC-BE03-E79964288B41}" type="datetimeFigureOut">
               <a:rPr lang="en-US" smtClean="0"/>
               <a:pPr algn="r"/>
-              <a:t>9/23/2025</a:t>
+              <a:t>9/24/2025</a:t>
             </a:fld>
             <a:endParaRPr lang="en-US" dirty="0"/>
           </a:p>
@@ -2581,7 +2581,7 @@
             <a:fld id="{53BEF823-48A5-43FC-BE03-E79964288B41}" type="datetimeFigureOut">
               <a:rPr lang="en-US" smtClean="0"/>
               <a:pPr algn="r"/>
-              <a:t>9/23/2025</a:t>
+              <a:t>9/24/2025</a:t>
             </a:fld>
             <a:endParaRPr lang="en-US" dirty="0"/>
           </a:p>
@@ -3024,7 +3024,7 @@
             <a:fld id="{53BEF823-48A5-43FC-BE03-E79964288B41}" type="datetimeFigureOut">
               <a:rPr lang="en-US" smtClean="0"/>
               <a:pPr algn="r"/>
-              <a:t>9/23/2025</a:t>
+              <a:t>9/24/2025</a:t>
             </a:fld>
             <a:endParaRPr lang="en-US" dirty="0"/>
           </a:p>
@@ -3170,7 +3170,7 @@
             <a:fld id="{53BEF823-48A5-43FC-BE03-E79964288B41}" type="datetimeFigureOut">
               <a:rPr lang="en-US" smtClean="0"/>
               <a:pPr algn="r"/>
-              <a:t>9/23/2025</a:t>
+              <a:t>9/24/2025</a:t>
             </a:fld>
             <a:endParaRPr lang="en-US" dirty="0"/>
           </a:p>
@@ -3288,7 +3288,7 @@
             <a:fld id="{53BEF823-48A5-43FC-BE03-E79964288B41}" type="datetimeFigureOut">
               <a:rPr lang="en-US" smtClean="0"/>
               <a:pPr algn="r"/>
-              <a:t>9/23/2025</a:t>
+              <a:t>9/24/2025</a:t>
             </a:fld>
             <a:endParaRPr lang="en-US" dirty="0"/>
           </a:p>
@@ -3572,7 +3572,7 @@
             <a:fld id="{53BEF823-48A5-43FC-BE03-E79964288B41}" type="datetimeFigureOut">
               <a:rPr lang="en-US" smtClean="0"/>
               <a:pPr algn="r"/>
-              <a:t>9/23/2025</a:t>
+              <a:t>9/24/2025</a:t>
             </a:fld>
             <a:endParaRPr lang="en-US" dirty="0"/>
           </a:p>
@@ -3867,7 +3867,7 @@
             <a:fld id="{53BEF823-48A5-43FC-BE03-E79964288B41}" type="datetimeFigureOut">
               <a:rPr lang="en-US" smtClean="0"/>
               <a:pPr algn="r"/>
-              <a:t>9/23/2025</a:t>
+              <a:t>9/24/2025</a:t>
             </a:fld>
             <a:endParaRPr lang="en-US" dirty="0"/>
           </a:p>
@@ -4362,7 +4362,7 @@
             <a:fld id="{53BEF823-48A5-43FC-BE03-E79964288B41}" type="datetimeFigureOut">
               <a:rPr lang="en-US" smtClean="0"/>
               <a:pPr algn="r"/>
-              <a:t>9/23/2025</a:t>
+              <a:t>9/24/2025</a:t>
             </a:fld>
             <a:endParaRPr lang="en-US" dirty="0"/>
           </a:p>
@@ -7105,6 +7105,36 @@
           <a:xfrm>
             <a:off x="1223595" y="777725"/>
             <a:ext cx="9896350" cy="5728179"/>
+          </a:xfrm>
+          <a:prstGeom prst="rect">
+            <a:avLst/>
+          </a:prstGeom>
+        </p:spPr>
+      </p:pic>
+      <p:pic>
+        <p:nvPicPr>
+          <p:cNvPr id="6" name="Picture 5">
+            <a:extLst>
+              <a:ext uri="{FF2B5EF4-FFF2-40B4-BE49-F238E27FC236}">
+                <a16:creationId xmlns:a16="http://schemas.microsoft.com/office/drawing/2014/main" id="{D316E51B-3250-8AEC-9623-D2325436CDEE}"/>
+              </a:ext>
+            </a:extLst>
+          </p:cNvPr>
+          <p:cNvPicPr>
+            <a:picLocks noChangeAspect="1"/>
+          </p:cNvPicPr>
+          <p:nvPr/>
+        </p:nvPicPr>
+        <p:blipFill>
+          <a:blip r:embed="rId5"/>
+          <a:stretch>
+            <a:fillRect/>
+          </a:stretch>
+        </p:blipFill>
+        <p:spPr>
+          <a:xfrm>
+            <a:off x="758951" y="684995"/>
+            <a:ext cx="10530371" cy="5820909"/>
           </a:xfrm>
           <a:prstGeom prst="rect">
             <a:avLst/>
@@ -8469,20 +8499,20 @@
 </file>
 
 <file path=customXml/item2.xml><?xml version="1.0" encoding="utf-8"?>
+<p:properties xmlns:p="http://schemas.microsoft.com/office/2006/metadata/properties" xmlns:xsi="http://www.w3.org/2001/XMLSchema-instance" xmlns:pc="http://schemas.microsoft.com/office/infopath/2007/PartnerControls">
+  <documentManagement>
+    <_activity xmlns="07466235-22bd-4fc8-b004-8eb7c938d2f7" xsi:nil="true"/>
+  </documentManagement>
+</p:properties>
+</file>
+
+<file path=customXml/item3.xml><?xml version="1.0" encoding="utf-8"?>
 <?mso-contentType ?>
 <FormTemplates xmlns="http://schemas.microsoft.com/sharepoint/v3/contenttype/forms">
   <Display>DocumentLibraryForm</Display>
   <Edit>DocumentLibraryForm</Edit>
   <New>DocumentLibraryForm</New>
 </FormTemplates>
-</file>
-
-<file path=customXml/item3.xml><?xml version="1.0" encoding="utf-8"?>
-<p:properties xmlns:p="http://schemas.microsoft.com/office/2006/metadata/properties" xmlns:xsi="http://www.w3.org/2001/XMLSchema-instance" xmlns:pc="http://schemas.microsoft.com/office/infopath/2007/PartnerControls">
-  <documentManagement>
-    <_activity xmlns="07466235-22bd-4fc8-b004-8eb7c938d2f7" xsi:nil="true"/>
-  </documentManagement>
-</p:properties>
 </file>
 
 <file path=customXml/itemProps1.xml><?xml version="1.0" encoding="utf-8"?>
@@ -8504,14 +8534,6 @@
 </file>
 
 <file path=customXml/itemProps2.xml><?xml version="1.0" encoding="utf-8"?>
-<ds:datastoreItem xmlns:ds="http://schemas.openxmlformats.org/officeDocument/2006/customXml" ds:itemID="{BF480E82-0FE6-463C-869B-C0B409AFCC7A}">
-  <ds:schemaRefs>
-    <ds:schemaRef ds:uri="http://schemas.microsoft.com/sharepoint/v3/contenttype/forms"/>
-  </ds:schemaRefs>
-</ds:datastoreItem>
-</file>
-
-<file path=customXml/itemProps3.xml><?xml version="1.0" encoding="utf-8"?>
 <ds:datastoreItem xmlns:ds="http://schemas.openxmlformats.org/officeDocument/2006/customXml" ds:itemID="{D542F790-C423-4587-B143-93DC4E353917}">
   <ds:schemaRefs>
     <ds:schemaRef ds:uri="http://schemas.microsoft.com/office/infopath/2007/PartnerControls"/>
@@ -8525,4 +8547,12 @@
     <ds:schemaRef ds:uri="http://purl.org/dc/terms/"/>
   </ds:schemaRefs>
 </ds:datastoreItem>
+</file>
+
+<file path=customXml/itemProps3.xml><?xml version="1.0" encoding="utf-8"?>
+<ds:datastoreItem xmlns:ds="http://schemas.openxmlformats.org/officeDocument/2006/customXml" ds:itemID="{BF480E82-0FE6-463C-869B-C0B409AFCC7A}">
+  <ds:schemaRefs>
+    <ds:schemaRef ds:uri="http://schemas.microsoft.com/sharepoint/v3/contenttype/forms"/>
+  </ds:schemaRefs>
+</ds:datastoreItem>
 </file>